--- a/assets/images/icon.pptx
+++ b/assets/images/icon.pptx
@@ -104,6 +104,11 @@
       </a:defRPr>
     </a:lvl9pPr>
   </p:defaultTextStyle>
+  <p:extLst>
+    <p:ext uri="{EFAFB233-063F-42B5-8137-9DF3F51BA10A}">
+      <p15:sldGuideLst xmlns:p15="http://schemas.microsoft.com/office/powerpoint/2012/main"/>
+    </p:ext>
+  </p:extLst>
 </p:presentation>
 </file>
 
@@ -254,7 +259,7 @@
           <a:p>
             <a:fld id="{1F133F16-5221-403F-8457-A5D464C7175A}" type="datetimeFigureOut">
               <a:rPr lang="zh-TW" altLang="en-US" smtClean="0"/>
-              <a:t>2026/4/16</a:t>
+              <a:t>2026/4/17</a:t>
             </a:fld>
             <a:endParaRPr lang="zh-TW" altLang="en-US"/>
           </a:p>
@@ -452,7 +457,7 @@
           <a:p>
             <a:fld id="{1F133F16-5221-403F-8457-A5D464C7175A}" type="datetimeFigureOut">
               <a:rPr lang="zh-TW" altLang="en-US" smtClean="0"/>
-              <a:t>2026/4/16</a:t>
+              <a:t>2026/4/17</a:t>
             </a:fld>
             <a:endParaRPr lang="zh-TW" altLang="en-US"/>
           </a:p>
@@ -660,7 +665,7 @@
           <a:p>
             <a:fld id="{1F133F16-5221-403F-8457-A5D464C7175A}" type="datetimeFigureOut">
               <a:rPr lang="zh-TW" altLang="en-US" smtClean="0"/>
-              <a:t>2026/4/16</a:t>
+              <a:t>2026/4/17</a:t>
             </a:fld>
             <a:endParaRPr lang="zh-TW" altLang="en-US"/>
           </a:p>
@@ -858,7 +863,7 @@
           <a:p>
             <a:fld id="{1F133F16-5221-403F-8457-A5D464C7175A}" type="datetimeFigureOut">
               <a:rPr lang="zh-TW" altLang="en-US" smtClean="0"/>
-              <a:t>2026/4/16</a:t>
+              <a:t>2026/4/17</a:t>
             </a:fld>
             <a:endParaRPr lang="zh-TW" altLang="en-US"/>
           </a:p>
@@ -1133,7 +1138,7 @@
           <a:p>
             <a:fld id="{1F133F16-5221-403F-8457-A5D464C7175A}" type="datetimeFigureOut">
               <a:rPr lang="zh-TW" altLang="en-US" smtClean="0"/>
-              <a:t>2026/4/16</a:t>
+              <a:t>2026/4/17</a:t>
             </a:fld>
             <a:endParaRPr lang="zh-TW" altLang="en-US"/>
           </a:p>
@@ -1398,7 +1403,7 @@
           <a:p>
             <a:fld id="{1F133F16-5221-403F-8457-A5D464C7175A}" type="datetimeFigureOut">
               <a:rPr lang="zh-TW" altLang="en-US" smtClean="0"/>
-              <a:t>2026/4/16</a:t>
+              <a:t>2026/4/17</a:t>
             </a:fld>
             <a:endParaRPr lang="zh-TW" altLang="en-US"/>
           </a:p>
@@ -1810,7 +1815,7 @@
           <a:p>
             <a:fld id="{1F133F16-5221-403F-8457-A5D464C7175A}" type="datetimeFigureOut">
               <a:rPr lang="zh-TW" altLang="en-US" smtClean="0"/>
-              <a:t>2026/4/16</a:t>
+              <a:t>2026/4/17</a:t>
             </a:fld>
             <a:endParaRPr lang="zh-TW" altLang="en-US"/>
           </a:p>
@@ -1951,7 +1956,7 @@
           <a:p>
             <a:fld id="{1F133F16-5221-403F-8457-A5D464C7175A}" type="datetimeFigureOut">
               <a:rPr lang="zh-TW" altLang="en-US" smtClean="0"/>
-              <a:t>2026/4/16</a:t>
+              <a:t>2026/4/17</a:t>
             </a:fld>
             <a:endParaRPr lang="zh-TW" altLang="en-US"/>
           </a:p>
@@ -2064,7 +2069,7 @@
           <a:p>
             <a:fld id="{1F133F16-5221-403F-8457-A5D464C7175A}" type="datetimeFigureOut">
               <a:rPr lang="zh-TW" altLang="en-US" smtClean="0"/>
-              <a:t>2026/4/16</a:t>
+              <a:t>2026/4/17</a:t>
             </a:fld>
             <a:endParaRPr lang="zh-TW" altLang="en-US"/>
           </a:p>
@@ -2375,7 +2380,7 @@
           <a:p>
             <a:fld id="{1F133F16-5221-403F-8457-A5D464C7175A}" type="datetimeFigureOut">
               <a:rPr lang="zh-TW" altLang="en-US" smtClean="0"/>
-              <a:t>2026/4/16</a:t>
+              <a:t>2026/4/17</a:t>
             </a:fld>
             <a:endParaRPr lang="zh-TW" altLang="en-US"/>
           </a:p>
@@ -2663,7 +2668,7 @@
           <a:p>
             <a:fld id="{1F133F16-5221-403F-8457-A5D464C7175A}" type="datetimeFigureOut">
               <a:rPr lang="zh-TW" altLang="en-US" smtClean="0"/>
-              <a:t>2026/4/16</a:t>
+              <a:t>2026/4/17</a:t>
             </a:fld>
             <a:endParaRPr lang="zh-TW" altLang="en-US"/>
           </a:p>
@@ -2904,7 +2909,7 @@
           <a:p>
             <a:fld id="{1F133F16-5221-403F-8457-A5D464C7175A}" type="datetimeFigureOut">
               <a:rPr lang="zh-TW" altLang="en-US" smtClean="0"/>
-              <a:t>2026/4/16</a:t>
+              <a:t>2026/4/17</a:t>
             </a:fld>
             <a:endParaRPr lang="zh-TW" altLang="en-US"/>
           </a:p>
@@ -3323,7 +3328,7 @@
       </p:grpSpPr>
       <p:sp>
         <p:nvSpPr>
-          <p:cNvPr id="4" name="矩形: 圓角 3">
+          <p:cNvPr id="5" name="矩形: 圓角 4">
             <a:extLst>
               <a:ext uri="{FF2B5EF4-FFF2-40B4-BE49-F238E27FC236}">
                 <a16:creationId xmlns:a16="http://schemas.microsoft.com/office/drawing/2014/main" id="{5AE6AE70-4F00-5167-356C-FAE4633A84E0}"/>
@@ -3335,8 +3340,8 @@
         </p:nvSpPr>
         <p:spPr>
           <a:xfrm>
-            <a:off x="5461000" y="2460625"/>
-            <a:ext cx="1216025" cy="1216025"/>
+            <a:off x="1832897" y="297528"/>
+            <a:ext cx="8540135" cy="6280253"/>
           </a:xfrm>
           <a:prstGeom prst="roundRect">
             <a:avLst>
@@ -3370,21 +3375,64 @@
           <a:bodyPr rtlCol="0" anchor="ctr"/>
           <a:lstStyle/>
           <a:p>
-            <a:pPr algn="ctr"/>
-            <a:r>
-              <a:rPr lang="en-US" altLang="zh-TW" sz="3600" dirty="0">
+            <a:pPr marL="180000" algn="ctr">
+              <a:spcBef>
+                <a:spcPts val="1200"/>
+              </a:spcBef>
+            </a:pPr>
+            <a:r>
+              <a:rPr lang="en-US" altLang="zh-TW" sz="4400" spc="60" dirty="0">
                 <a:solidFill>
                   <a:schemeClr val="tx1"/>
                 </a:solidFill>
-                <a:latin typeface="Neue Haas Grotesk Text Pro" panose="020B0504020202020204" pitchFamily="34" charset="0"/>
+                <a:latin typeface="Neue Haas Grotesk D W0445" panose="020B0404020202020204" pitchFamily="34" charset="0"/>
                 <a:ea typeface="BIZ UDGothic" panose="020B0400000000000000" pitchFamily="33" charset="-128"/>
               </a:rPr>
               <a:t>Rice</a:t>
             </a:r>
-            <a:endParaRPr lang="zh-TW" altLang="en-US" sz="3600" dirty="0">
+            <a:r>
+              <a:rPr lang="zh-TW" altLang="en-US" sz="4400" spc="60" dirty="0">
+                <a:solidFill>
+                  <a:schemeClr val="tx1"/>
+                </a:solidFill>
+                <a:latin typeface="Neue Haas Grotesk D W0445" panose="020B0404020202020204" pitchFamily="34" charset="0"/>
+                <a:ea typeface="BIZ UDGothic" panose="020B0400000000000000" pitchFamily="33" charset="-128"/>
+              </a:rPr>
+              <a:t> </a:t>
+            </a:r>
+            <a:r>
+              <a:rPr lang="en-US" altLang="zh-TW" sz="4400" spc="60" dirty="0">
+                <a:solidFill>
+                  <a:schemeClr val="tx1"/>
+                </a:solidFill>
+                <a:latin typeface="Neue Haas Grotesk D W0445" panose="020B0404020202020204" pitchFamily="34" charset="0"/>
+                <a:ea typeface="BIZ UDGothic" panose="020B0400000000000000" pitchFamily="33" charset="-128"/>
+              </a:rPr>
+              <a:t>Quality</a:t>
+            </a:r>
+          </a:p>
+          <a:p>
+            <a:pPr marL="180000" algn="ctr">
+              <a:spcBef>
+                <a:spcPts val="1200"/>
+              </a:spcBef>
+            </a:pPr>
+            <a:r>
+              <a:rPr lang="zh-TW" altLang="en-US" sz="4400" dirty="0">
+                <a:solidFill>
+                  <a:schemeClr val="tx1"/>
+                </a:solidFill>
+                <a:latin typeface="Yu Gothic UI" panose="020B0500000000000000" pitchFamily="34" charset="-128"/>
+                <a:ea typeface="Yu Gothic UI" panose="020B0500000000000000" pitchFamily="34" charset="-128"/>
+              </a:rPr>
+              <a:t>稻米品質</a:t>
+            </a:r>
+            <a:endParaRPr lang="en-US" altLang="zh-TW" sz="4400" dirty="0">
               <a:solidFill>
                 <a:schemeClr val="tx1"/>
               </a:solidFill>
+              <a:latin typeface="Yu Gothic UI" panose="020B0500000000000000" pitchFamily="34" charset="-128"/>
+              <a:ea typeface="Yu Gothic UI" panose="020B0500000000000000" pitchFamily="34" charset="-128"/>
             </a:endParaRPr>
           </a:p>
         </p:txBody>

--- a/assets/images/icon.pptx
+++ b/assets/images/icon.pptx
@@ -3340,7 +3340,7 @@
         </p:nvSpPr>
         <p:spPr>
           <a:xfrm>
-            <a:off x="1832897" y="297528"/>
+            <a:off x="1861472" y="316578"/>
             <a:ext cx="8540135" cy="6280253"/>
           </a:xfrm>
           <a:prstGeom prst="roundRect">
@@ -3385,8 +3385,9 @@
                 <a:solidFill>
                   <a:schemeClr val="tx1"/>
                 </a:solidFill>
-                <a:latin typeface="Neue Haas Grotesk D W0445" panose="020B0404020202020204" pitchFamily="34" charset="0"/>
-                <a:ea typeface="BIZ UDGothic" panose="020B0400000000000000" pitchFamily="33" charset="-128"/>
+                <a:latin typeface="Neue Haas Grotesk Text Pro" panose="020B0504020202020204" pitchFamily="34" charset="0"/>
+                <a:ea typeface="DejaVu Math TeX Gyre" panose="02000503000000000000" pitchFamily="2" charset="0"/>
+                <a:cs typeface="DejaVu Math TeX Gyre" panose="02000503000000000000" pitchFamily="2" charset="0"/>
               </a:rPr>
               <a:t>Rice</a:t>
             </a:r>
@@ -3395,8 +3396,9 @@
                 <a:solidFill>
                   <a:schemeClr val="tx1"/>
                 </a:solidFill>
-                <a:latin typeface="Neue Haas Grotesk D W0445" panose="020B0404020202020204" pitchFamily="34" charset="0"/>
+                <a:latin typeface="Neue Haas Grotesk Text Pro" panose="020B0504020202020204" pitchFamily="34" charset="0"/>
                 <a:ea typeface="BIZ UDGothic" panose="020B0400000000000000" pitchFamily="33" charset="-128"/>
+                <a:cs typeface="DejaVu Math TeX Gyre" panose="02000503000000000000" pitchFamily="2" charset="0"/>
               </a:rPr>
               <a:t> </a:t>
             </a:r>
@@ -3405,8 +3407,9 @@
                 <a:solidFill>
                   <a:schemeClr val="tx1"/>
                 </a:solidFill>
-                <a:latin typeface="Neue Haas Grotesk D W0445" panose="020B0404020202020204" pitchFamily="34" charset="0"/>
-                <a:ea typeface="BIZ UDGothic" panose="020B0400000000000000" pitchFamily="33" charset="-128"/>
+                <a:latin typeface="Neue Haas Grotesk Text Pro" panose="020B0504020202020204" pitchFamily="34" charset="0"/>
+                <a:ea typeface="DejaVu Math TeX Gyre" panose="02000503000000000000" pitchFamily="2" charset="0"/>
+                <a:cs typeface="DejaVu Math TeX Gyre" panose="02000503000000000000" pitchFamily="2" charset="0"/>
               </a:rPr>
               <a:t>Quality</a:t>
             </a:r>
